--- a/chapter10/parts/part-03-statistical-distributions-and-simulation/clip.pptx
+++ b/chapter10/parts/part-03-statistical-distributions-and-simulation/clip.pptx
@@ -4328,10 +4328,12 @@
           </a:bodyPr>
           <a:lstStyle/>
           <a:p>
-            <a:pPr>
+            <a:pPr lvl="0" marL="457200" indent="-228600">
+              <a:buFont typeface="Calibri"/>
               <a:spcAft>
                 <a:spcPts val="1000"/>
               </a:spcAft>
+              <a:buSzPct val="100000"/>
               <a:buChar char="•"/>
               <a:lnSpc>
                 <a:spcPts val="2200"/>
@@ -4348,10 +4350,12 @@
             </a:r>
           </a:p>
           <a:p>
-            <a:pPr>
+            <a:pPr lvl="0" marL="457200" indent="-228600">
+              <a:buFont typeface="Calibri"/>
               <a:spcAft>
                 <a:spcPts val="1000"/>
               </a:spcAft>
+              <a:buSzPct val="100000"/>
               <a:buChar char="•"/>
               <a:lnSpc>
                 <a:spcPts val="2200"/>
@@ -4368,10 +4372,12 @@
             </a:r>
           </a:p>
           <a:p>
-            <a:pPr>
+            <a:pPr lvl="0" marL="457200" indent="-228600">
+              <a:buFont typeface="Calibri"/>
               <a:spcAft>
                 <a:spcPts val="1000"/>
               </a:spcAft>
+              <a:buSzPct val="100000"/>
               <a:buChar char="•"/>
               <a:lnSpc>
                 <a:spcPts val="2200"/>
@@ -4507,10 +4513,12 @@
           </a:bodyPr>
           <a:lstStyle/>
           <a:p>
-            <a:pPr>
+            <a:pPr lvl="0" marL="457200" indent="-228600">
+              <a:buFont typeface="Calibri"/>
               <a:spcAft>
                 <a:spcPts val="1000"/>
               </a:spcAft>
+              <a:buSzPct val="100000"/>
               <a:buChar char="•"/>
               <a:lnSpc>
                 <a:spcPts val="2200"/>
@@ -4527,10 +4535,12 @@
             </a:r>
           </a:p>
           <a:p>
-            <a:pPr>
+            <a:pPr lvl="0" marL="457200" indent="-228600">
+              <a:buFont typeface="Calibri"/>
               <a:spcAft>
                 <a:spcPts val="1000"/>
               </a:spcAft>
+              <a:buSzPct val="100000"/>
               <a:buChar char="•"/>
               <a:lnSpc>
                 <a:spcPts val="2200"/>
@@ -4547,10 +4557,12 @@
             </a:r>
           </a:p>
           <a:p>
-            <a:pPr>
+            <a:pPr lvl="0" marL="457200" indent="-228600">
+              <a:buFont typeface="Calibri"/>
               <a:spcAft>
                 <a:spcPts val="1000"/>
               </a:spcAft>
+              <a:buSzPct val="100000"/>
               <a:buChar char="•"/>
               <a:lnSpc>
                 <a:spcPts val="2200"/>
@@ -4686,10 +4698,12 @@
           </a:bodyPr>
           <a:lstStyle/>
           <a:p>
-            <a:pPr>
+            <a:pPr lvl="0" marL="457200" indent="-228600">
+              <a:buFont typeface="Calibri"/>
               <a:spcAft>
                 <a:spcPts val="1000"/>
               </a:spcAft>
+              <a:buSzPct val="100000"/>
               <a:buChar char="•"/>
               <a:lnSpc>
                 <a:spcPts val="2200"/>
@@ -4706,10 +4720,12 @@
             </a:r>
           </a:p>
           <a:p>
-            <a:pPr>
+            <a:pPr lvl="0" marL="457200" indent="-228600">
+              <a:buFont typeface="Calibri"/>
               <a:spcAft>
                 <a:spcPts val="1000"/>
               </a:spcAft>
+              <a:buSzPct val="100000"/>
               <a:buChar char="•"/>
               <a:lnSpc>
                 <a:spcPts val="2200"/>
@@ -4845,10 +4861,12 @@
           </a:bodyPr>
           <a:lstStyle/>
           <a:p>
-            <a:pPr>
+            <a:pPr lvl="0" marL="457200" indent="-228600">
+              <a:buFont typeface="Calibri"/>
               <a:spcAft>
                 <a:spcPts val="1000"/>
               </a:spcAft>
+              <a:buSzPct val="100000"/>
               <a:buChar char="•"/>
               <a:lnSpc>
                 <a:spcPts val="2200"/>
@@ -4984,10 +5002,12 @@
           </a:bodyPr>
           <a:lstStyle/>
           <a:p>
-            <a:pPr>
+            <a:pPr lvl="0" marL="457200" indent="-228600">
+              <a:buFont typeface="Calibri"/>
               <a:spcAft>
                 <a:spcPts val="1000"/>
               </a:spcAft>
+              <a:buSzPct val="100000"/>
               <a:buChar char="•"/>
               <a:lnSpc>
                 <a:spcPts val="2200"/>
@@ -5004,10 +5024,12 @@
             </a:r>
           </a:p>
           <a:p>
-            <a:pPr>
+            <a:pPr lvl="0" marL="457200" indent="-228600">
+              <a:buFont typeface="Calibri"/>
               <a:spcAft>
                 <a:spcPts val="1000"/>
               </a:spcAft>
+              <a:buSzPct val="100000"/>
               <a:buChar char="•"/>
               <a:lnSpc>
                 <a:spcPts val="2200"/>
@@ -5024,10 +5046,12 @@
             </a:r>
           </a:p>
           <a:p>
-            <a:pPr>
+            <a:pPr lvl="0" marL="457200" indent="-228600">
+              <a:buFont typeface="Calibri"/>
               <a:spcAft>
                 <a:spcPts val="1000"/>
               </a:spcAft>
+              <a:buSzPct val="100000"/>
               <a:buChar char="•"/>
               <a:lnSpc>
                 <a:spcPts val="2200"/>
@@ -5163,10 +5187,12 @@
           </a:bodyPr>
           <a:lstStyle/>
           <a:p>
-            <a:pPr>
+            <a:pPr lvl="0" marL="457200" indent="-228600">
+              <a:buFont typeface="Calibri"/>
               <a:spcAft>
                 <a:spcPts val="1000"/>
               </a:spcAft>
+              <a:buSzPct val="100000"/>
               <a:buChar char="•"/>
               <a:lnSpc>
                 <a:spcPts val="2200"/>
@@ -5183,10 +5209,12 @@
             </a:r>
           </a:p>
           <a:p>
-            <a:pPr>
+            <a:pPr lvl="0" marL="457200" indent="-228600">
+              <a:buFont typeface="Calibri"/>
               <a:spcAft>
                 <a:spcPts val="1000"/>
               </a:spcAft>
+              <a:buSzPct val="100000"/>
               <a:buChar char="•"/>
               <a:lnSpc>
                 <a:spcPts val="2200"/>
@@ -5203,10 +5231,12 @@
             </a:r>
           </a:p>
           <a:p>
-            <a:pPr>
+            <a:pPr lvl="0" marL="457200" indent="-228600">
+              <a:buFont typeface="Calibri"/>
               <a:spcAft>
                 <a:spcPts val="1000"/>
               </a:spcAft>
+              <a:buSzPct val="100000"/>
               <a:buChar char="•"/>
               <a:lnSpc>
                 <a:spcPts val="2200"/>
@@ -5342,10 +5372,12 @@
           </a:bodyPr>
           <a:lstStyle/>
           <a:p>
-            <a:pPr>
+            <a:pPr lvl="0" marL="457200" indent="-228600">
+              <a:buFont typeface="Calibri"/>
               <a:spcAft>
                 <a:spcPts val="1000"/>
               </a:spcAft>
+              <a:buSzPct val="100000"/>
               <a:buChar char="•"/>
               <a:lnSpc>
                 <a:spcPts val="2200"/>
@@ -5362,10 +5394,12 @@
             </a:r>
           </a:p>
           <a:p>
-            <a:pPr>
+            <a:pPr lvl="0" marL="457200" indent="-228600">
+              <a:buFont typeface="Calibri"/>
               <a:spcAft>
                 <a:spcPts val="1000"/>
               </a:spcAft>
+              <a:buSzPct val="100000"/>
               <a:buChar char="•"/>
               <a:lnSpc>
                 <a:spcPts val="2200"/>
@@ -5382,10 +5416,12 @@
             </a:r>
           </a:p>
           <a:p>
-            <a:pPr>
+            <a:pPr lvl="0" marL="457200" indent="-228600">
+              <a:buFont typeface="Calibri"/>
               <a:spcAft>
                 <a:spcPts val="1000"/>
               </a:spcAft>
+              <a:buSzPct val="100000"/>
               <a:buChar char="•"/>
               <a:lnSpc>
                 <a:spcPts val="2200"/>
@@ -5402,10 +5438,12 @@
             </a:r>
           </a:p>
           <a:p>
-            <a:pPr>
+            <a:pPr lvl="0" marL="457200" indent="-228600">
+              <a:buFont typeface="Calibri"/>
               <a:spcAft>
                 <a:spcPts val="1000"/>
               </a:spcAft>
+              <a:buSzPct val="100000"/>
               <a:buChar char="•"/>
               <a:lnSpc>
                 <a:spcPts val="2200"/>
@@ -5422,10 +5460,12 @@
             </a:r>
           </a:p>
           <a:p>
-            <a:pPr>
+            <a:pPr lvl="0" marL="457200" indent="-228600">
+              <a:buFont typeface="Calibri"/>
               <a:spcAft>
                 <a:spcPts val="1000"/>
               </a:spcAft>
+              <a:buSzPct val="100000"/>
               <a:buChar char="•"/>
               <a:lnSpc>
                 <a:spcPts val="2200"/>
@@ -6024,10 +6064,12 @@
           </a:bodyPr>
           <a:lstStyle/>
           <a:p>
-            <a:pPr>
+            <a:pPr lvl="0" marL="457200" indent="-228600">
+              <a:buFont typeface="Calibri"/>
               <a:spcAft>
                 <a:spcPts val="1000"/>
               </a:spcAft>
+              <a:buSzPct val="100000"/>
               <a:buChar char="•"/>
               <a:lnSpc>
                 <a:spcPts val="2200"/>
@@ -6044,10 +6086,12 @@
             </a:r>
           </a:p>
           <a:p>
-            <a:pPr>
+            <a:pPr lvl="0" marL="457200" indent="-228600">
+              <a:buFont typeface="Calibri"/>
               <a:spcAft>
                 <a:spcPts val="1000"/>
               </a:spcAft>
+              <a:buSzPct val="100000"/>
               <a:buChar char="•"/>
               <a:lnSpc>
                 <a:spcPts val="2200"/>
@@ -6064,10 +6108,12 @@
             </a:r>
           </a:p>
           <a:p>
-            <a:pPr>
+            <a:pPr lvl="0" marL="457200" indent="-228600">
+              <a:buFont typeface="Calibri"/>
               <a:spcAft>
                 <a:spcPts val="1000"/>
               </a:spcAft>
+              <a:buSzPct val="100000"/>
               <a:buChar char="•"/>
               <a:lnSpc>
                 <a:spcPts val="2200"/>
@@ -6203,10 +6249,12 @@
           </a:bodyPr>
           <a:lstStyle/>
           <a:p>
-            <a:pPr>
+            <a:pPr lvl="0" marL="457200" indent="-228600">
+              <a:buFont typeface="Calibri"/>
               <a:spcAft>
                 <a:spcPts val="1000"/>
               </a:spcAft>
+              <a:buSzPct val="100000"/>
               <a:buChar char="•"/>
               <a:lnSpc>
                 <a:spcPts val="2200"/>
@@ -6223,10 +6271,12 @@
             </a:r>
           </a:p>
           <a:p>
-            <a:pPr>
+            <a:pPr lvl="0" marL="457200" indent="-228600">
+              <a:buFont typeface="Calibri"/>
               <a:spcAft>
                 <a:spcPts val="1000"/>
               </a:spcAft>
+              <a:buSzPct val="100000"/>
               <a:buChar char="•"/>
               <a:lnSpc>
                 <a:spcPts val="2200"/>
@@ -6243,10 +6293,12 @@
             </a:r>
           </a:p>
           <a:p>
-            <a:pPr>
+            <a:pPr lvl="0" marL="457200" indent="-228600">
+              <a:buFont typeface="Calibri"/>
               <a:spcAft>
                 <a:spcPts val="1000"/>
               </a:spcAft>
+              <a:buSzPct val="100000"/>
               <a:buChar char="•"/>
               <a:lnSpc>
                 <a:spcPts val="2200"/>
@@ -6263,10 +6315,12 @@
             </a:r>
           </a:p>
           <a:p>
-            <a:pPr>
+            <a:pPr lvl="0" marL="457200" indent="-228600">
+              <a:buFont typeface="Calibri"/>
               <a:spcAft>
                 <a:spcPts val="1000"/>
               </a:spcAft>
+              <a:buSzPct val="100000"/>
               <a:buChar char="•"/>
               <a:lnSpc>
                 <a:spcPts val="2200"/>
@@ -6283,10 +6337,12 @@
             </a:r>
           </a:p>
           <a:p>
-            <a:pPr>
+            <a:pPr lvl="0" marL="457200" indent="-228600">
+              <a:buFont typeface="Calibri"/>
               <a:spcAft>
                 <a:spcPts val="1000"/>
               </a:spcAft>
+              <a:buSzPct val="100000"/>
               <a:buChar char="•"/>
               <a:lnSpc>
                 <a:spcPts val="2200"/>
